--- a/Week_2/Core_Java.pptx
+++ b/Week_2/Core_Java.pptx
@@ -439,7 +439,7 @@
             <a:fld id="{B61BEF0D-F0BB-DE4B-95CE-6DB70DBA9567}" type="datetimeFigureOut">
               <a:rPr lang="en-US" dirty="0"/>
               <a:pPr/>
-              <a:t>8/30/2026</a:t>
+              <a:t>9/10/2026</a:t>
             </a:fld>
             <a:endParaRPr lang="en-US" dirty="0"/>
           </a:p>
@@ -701,7 +701,7 @@
             <a:fld id="{B61BEF0D-F0BB-DE4B-95CE-6DB70DBA9567}" type="datetimeFigureOut">
               <a:rPr lang="en-US" dirty="0"/>
               <a:pPr/>
-              <a:t>8/30/2026</a:t>
+              <a:t>9/10/2026</a:t>
             </a:fld>
             <a:endParaRPr lang="en-US" dirty="0"/>
           </a:p>
@@ -936,7 +936,7 @@
             <a:fld id="{B61BEF0D-F0BB-DE4B-95CE-6DB70DBA9567}" type="datetimeFigureOut">
               <a:rPr lang="en-US" dirty="0"/>
               <a:pPr/>
-              <a:t>8/30/2026</a:t>
+              <a:t>9/10/2026</a:t>
             </a:fld>
             <a:endParaRPr lang="en-US" dirty="0"/>
           </a:p>
@@ -1183,7 +1183,7 @@
             <a:fld id="{B61BEF0D-F0BB-DE4B-95CE-6DB70DBA9567}" type="datetimeFigureOut">
               <a:rPr lang="en-US" dirty="0"/>
               <a:pPr/>
-              <a:t>8/30/2026</a:t>
+              <a:t>9/10/2026</a:t>
             </a:fld>
             <a:endParaRPr lang="en-US" dirty="0"/>
           </a:p>
@@ -1491,7 +1491,7 @@
             <a:fld id="{B61BEF0D-F0BB-DE4B-95CE-6DB70DBA9567}" type="datetimeFigureOut">
               <a:rPr lang="en-US" dirty="0"/>
               <a:pPr/>
-              <a:t>8/30/2026</a:t>
+              <a:t>9/10/2026</a:t>
             </a:fld>
             <a:endParaRPr lang="en-US" dirty="0"/>
           </a:p>
@@ -1792,7 +1792,7 @@
             <a:fld id="{B61BEF0D-F0BB-DE4B-95CE-6DB70DBA9567}" type="datetimeFigureOut">
               <a:rPr lang="en-US" dirty="0"/>
               <a:pPr/>
-              <a:t>8/30/2026</a:t>
+              <a:t>9/10/2026</a:t>
             </a:fld>
             <a:endParaRPr lang="en-US" dirty="0"/>
           </a:p>
@@ -2213,7 +2213,7 @@
             <a:fld id="{B61BEF0D-F0BB-DE4B-95CE-6DB70DBA9567}" type="datetimeFigureOut">
               <a:rPr lang="en-US" dirty="0"/>
               <a:pPr/>
-              <a:t>8/30/2026</a:t>
+              <a:t>9/10/2026</a:t>
             </a:fld>
             <a:endParaRPr lang="en-US" dirty="0"/>
           </a:p>
@@ -2376,7 +2376,7 @@
             <a:fld id="{B61BEF0D-F0BB-DE4B-95CE-6DB70DBA9567}" type="datetimeFigureOut">
               <a:rPr lang="en-US" dirty="0"/>
               <a:pPr/>
-              <a:t>8/30/2026</a:t>
+              <a:t>9/10/2026</a:t>
             </a:fld>
             <a:endParaRPr lang="en-US" dirty="0"/>
           </a:p>
@@ -2473,7 +2473,7 @@
             <a:fld id="{B61BEF0D-F0BB-DE4B-95CE-6DB70DBA9567}" type="datetimeFigureOut">
               <a:rPr lang="en-US" dirty="0"/>
               <a:pPr/>
-              <a:t>8/30/2026</a:t>
+              <a:t>9/10/2026</a:t>
             </a:fld>
             <a:endParaRPr lang="en-US" dirty="0"/>
           </a:p>
@@ -2851,7 +2851,7 @@
             <a:fld id="{B61BEF0D-F0BB-DE4B-95CE-6DB70DBA9567}" type="datetimeFigureOut">
               <a:rPr lang="en-US" dirty="0"/>
               <a:pPr/>
-              <a:t>8/30/2026</a:t>
+              <a:t>9/10/2026</a:t>
             </a:fld>
             <a:endParaRPr lang="en-US" dirty="0"/>
           </a:p>
@@ -3137,7 +3137,7 @@
             <a:fld id="{B61BEF0D-F0BB-DE4B-95CE-6DB70DBA9567}" type="datetimeFigureOut">
               <a:rPr lang="en-US" dirty="0"/>
               <a:pPr/>
-              <a:t>8/30/2026</a:t>
+              <a:t>9/10/2026</a:t>
             </a:fld>
             <a:endParaRPr lang="en-US" dirty="0"/>
           </a:p>
@@ -3376,7 +3376,7 @@
             <a:fld id="{B61BEF0D-F0BB-DE4B-95CE-6DB70DBA9567}" type="datetimeFigureOut">
               <a:rPr lang="en-US" dirty="0"/>
               <a:pPr/>
-              <a:t>8/30/2026</a:t>
+              <a:t>9/10/2026</a:t>
             </a:fld>
             <a:endParaRPr lang="en-US" dirty="0"/>
           </a:p>
@@ -22637,6 +22637,50 @@
           </a:prstGeom>
         </p:spPr>
       </p:pic>
+      <p:sp>
+        <p:nvSpPr>
+          <p:cNvPr id="3" name="Rectangle 2">
+            <a:extLst>
+              <a:ext uri="{FF2B5EF4-FFF2-40B4-BE49-F238E27FC236}">
+                <a16:creationId xmlns:a16="http://schemas.microsoft.com/office/drawing/2014/main" id="{3304E979-EF37-550E-FFE4-10AFDE01727A}"/>
+              </a:ext>
+            </a:extLst>
+          </p:cNvPr>
+          <p:cNvSpPr/>
+          <p:nvPr/>
+        </p:nvSpPr>
+        <p:spPr>
+          <a:xfrm>
+            <a:off x="10742621" y="958535"/>
+            <a:ext cx="645090" cy="501041"/>
+          </a:xfrm>
+          <a:prstGeom prst="rect">
+            <a:avLst/>
+          </a:prstGeom>
+        </p:spPr>
+        <p:style>
+          <a:lnRef idx="1">
+            <a:schemeClr val="accent5"/>
+          </a:lnRef>
+          <a:fillRef idx="3">
+            <a:schemeClr val="accent5"/>
+          </a:fillRef>
+          <a:effectRef idx="2">
+            <a:schemeClr val="accent5"/>
+          </a:effectRef>
+          <a:fontRef idx="minor">
+            <a:schemeClr val="lt1"/>
+          </a:fontRef>
+        </p:style>
+        <p:txBody>
+          <a:bodyPr rtlCol="0" anchor="ctr"/>
+          <a:lstStyle/>
+          <a:p>
+            <a:pPr algn="ctr"/>
+            <a:endParaRPr lang="en-US"/>
+          </a:p>
+        </p:txBody>
+      </p:sp>
     </p:spTree>
     <p:extLst>
       <p:ext uri="{BB962C8B-B14F-4D97-AF65-F5344CB8AC3E}">
